--- a/Docs/AI_Agent_활용을 위한 개념.pptx
+++ b/Docs/AI_Agent_활용을 위한 개념.pptx
@@ -2422,7 +2422,7 @@
                   <a:srgbClr val="8899BB"/>
                 </a:solidFill>
               </a:rPr>
-              <a:t>: 2026-02-24  </a:t>
+              <a:t>: 2026-06-28  </a:t>
             </a:r>
             <a:r>
               <a:rPr lang="en-US" sz="1050" b="1" dirty="0">
@@ -6963,7 +6963,7 @@
                   <a:srgbClr val="8899BB"/>
                 </a:solidFill>
               </a:rPr>
-              <a:t>완전 성숙 (2025년 초 공식 릴리스)</a:t>
+              <a:t>도구 문서 기준으로 확인</a:t>
             </a:r>
             <a:endParaRPr lang="en-US" sz="1000" dirty="0"/>
           </a:p>
@@ -6977,7 +6977,7 @@
                   <a:srgbClr val="8899BB"/>
                 </a:solidFill>
               </a:rPr>
-              <a:t>100+ 커뮤니티 subagent 오픈소스</a:t>
+              <a:t>커뮤니티 subagent 예시 다수</a:t>
             </a:r>
             <a:endParaRPr lang="en-US" sz="1000" dirty="0"/>
           </a:p>
@@ -7123,7 +7123,7 @@
                   <a:srgbClr val="FBBF24"/>
                 </a:solidFill>
               </a:rPr>
-              <a:t>🟡 실험 단계</a:t>
+              <a:t>🟡 환경별 확인 필요</a:t>
             </a:r>
             <a:endParaRPr lang="en-US" sz="1200" dirty="0"/>
           </a:p>
@@ -7159,7 +7159,7 @@
                   <a:srgbClr val="8899BB"/>
                 </a:solidFill>
               </a:rPr>
-              <a:t>enableAgents 활성화 필요</a:t>
+              <a:t>사용 전 지원 여부 확인</a:t>
             </a:r>
             <a:endParaRPr lang="en-US" sz="1000" dirty="0"/>
           </a:p>
@@ -7173,7 +7173,7 @@
                   <a:srgbClr val="8899BB"/>
                 </a:solidFill>
               </a:rPr>
-              <a:t>YOLO 모드 </a:t>
+              <a:t>권한 설정 </a:t>
             </a:r>
             <a:r>
               <a:rPr lang="en-US" sz="1000" dirty="0" err="1">
@@ -7218,7 +7218,7 @@
                   <a:srgbClr val="8899BB"/>
                 </a:solidFill>
               </a:rPr>
-              <a:t>공식 문서 Warning 표시됨</a:t>
+              <a:t>버전별 동작 차이 확인</a:t>
             </a:r>
             <a:endParaRPr lang="en-US" sz="1000" dirty="0"/>
           </a:p>
@@ -7350,7 +7350,7 @@
                   <a:srgbClr val="FBBF24"/>
                 </a:solidFill>
               </a:rPr>
-              <a:t>🟡 실험 단계</a:t>
+              <a:t>🟡 환경별 확인 필요</a:t>
             </a:r>
             <a:endParaRPr lang="en-US" sz="1200" dirty="0"/>
           </a:p>
@@ -7386,7 +7386,7 @@
                   <a:srgbClr val="8899BB"/>
                 </a:solidFill>
               </a:rPr>
-              <a:t>Multi-agent 개념 존재</a:t>
+              <a:t>Multi-agent 지원 방식 확인</a:t>
             </a:r>
             <a:endParaRPr lang="en-US" sz="1000" dirty="0"/>
           </a:p>
@@ -7400,7 +7400,7 @@
                   <a:srgbClr val="8899BB"/>
                 </a:solidFill>
               </a:rPr>
-              <a:t>/experimental 활성화 필요</a:t>
+              <a:t>사용 전 지원 방식 확인</a:t>
             </a:r>
             <a:endParaRPr lang="en-US" sz="1000" dirty="0"/>
           </a:p>
@@ -7799,7 +7799,7 @@
                 <a:ea typeface="Consolas" pitchFamily="34" charset="-122"/>
                 <a:cs typeface="Consolas" pitchFamily="34" charset="-120"/>
               </a:rPr>
-              <a:t>model: </a:t>
+              <a:t># model 필드 하드코딩 금지: </a:t>
             </a:r>
             <a:r>
               <a:rPr lang="en-US" sz="1100" dirty="0">
@@ -7810,7 +7810,7 @@
                 <a:ea typeface="Consolas" pitchFamily="34" charset="-122"/>
                 <a:cs typeface="Consolas" pitchFamily="34" charset="-120"/>
               </a:rPr>
-              <a:t>opus        </a:t>
+              <a:t>환경에서 선택</a:t>
             </a:r>
             <a:r>
               <a:rPr lang="en-US" sz="1100" dirty="0">
@@ -7821,7 +7821,7 @@
                 <a:ea typeface="Consolas" pitchFamily="34" charset="-122"/>
                 <a:cs typeface="Consolas" pitchFamily="34" charset="-120"/>
               </a:rPr>
-              <a:t># 선택 (기본: inherit)
+              <a:t>모델은 사용자/환경에서 선택
 </a:t>
             </a:r>
             <a:r>
@@ -10426,7 +10426,7 @@
                 <a:ea typeface="Consolas" pitchFamily="34" charset="-122"/>
                 <a:cs typeface="Consolas" pitchFamily="34" charset="-120"/>
               </a:rPr>
-              <a:t>실험적 지원 🟡</a:t>
+              <a:t>환경별 확인 필요 🟡</a:t>
             </a:r>
             <a:endParaRPr lang="en-US" sz="800" dirty="0"/>
           </a:p>
@@ -10490,7 +10490,7 @@
                 <a:ea typeface="Consolas" pitchFamily="34" charset="-122"/>
                 <a:cs typeface="Consolas" pitchFamily="34" charset="-120"/>
               </a:rPr>
-              <a:t>실험적 지원 🟡</a:t>
+              <a:t>환경별 확인 필요 🟡</a:t>
             </a:r>
             <a:endParaRPr lang="en-US" sz="800" dirty="0"/>
           </a:p>
@@ -11457,7 +11457,7 @@
                 <a:ea typeface="Arial Black" pitchFamily="34" charset="-122"/>
                 <a:cs typeface="Arial Black" pitchFamily="34" charset="-120"/>
               </a:rPr>
-              <a:t>Subagent는 Claude만</a:t>
+              <a:t>Subagent는 도구별 차이</a:t>
             </a:r>
             <a:endParaRPr lang="en-US" sz="1100" dirty="0"/>
           </a:p>
@@ -11496,7 +11496,7 @@
                 <a:ea typeface="Calibri" pitchFamily="34" charset="-122"/>
                 <a:cs typeface="Calibri" pitchFamily="34" charset="-120"/>
               </a:rPr>
-              <a:t>2026.02 기준 Production-ready는 Claude Code뿐. 타도구는 실험적</a:t>
+              <a:t>도구마다 지원 방식이 다르므로 실행 전 환경 확인 필요</a:t>
             </a:r>
             <a:endParaRPr lang="en-US" sz="1200" dirty="0"/>
           </a:p>
@@ -16072,7 +16072,7 @@
                 <a:ea typeface="Consolas" pitchFamily="34" charset="-122"/>
                 <a:cs typeface="Consolas" pitchFamily="34" charset="-120"/>
               </a:rPr>
-              <a:t>@.ai/instruction/coding-style.md
+              <a:t>@.docs/instruction/coding-style.md
 </a:t>
             </a:r>
             <a:r>
@@ -16096,8 +16096,8 @@
                 <a:ea typeface="Consolas" pitchFamily="34" charset="-122"/>
                 <a:cs typeface="Consolas" pitchFamily="34" charset="-120"/>
               </a:rPr>
-              <a:t>@.ai/rules/global-rules.md
-@.ai/rules/backend-rules.md</a:t>
+              <a:t>@.docs/rules/global-rules.md
+@.docs/rules/backend-rules.md</a:t>
             </a:r>
             <a:endParaRPr lang="en-US" sz="1050" dirty="0"/>
           </a:p>
@@ -16682,7 +16682,7 @@
                 <a:ea typeface="Calibri" pitchFamily="34" charset="-122"/>
                 <a:cs typeface="Calibri" pitchFamily="34" charset="-120"/>
               </a:rPr>
-              <a:t>예: .ai/instruction/ .ai/rules/</a:t>
+              <a:t>예: .docs/instruction/ .docs/rules/</a:t>
             </a:r>
             <a:endParaRPr lang="en-US" sz="1100" dirty="0"/>
           </a:p>
@@ -17036,8 +17036,8 @@
                 <a:ea typeface="Consolas" pitchFamily="34" charset="-122"/>
                 <a:cs typeface="Consolas" pitchFamily="34" charset="-120"/>
               </a:rPr>
-              <a:t>@.ai/rules/global-rules.md
-@.ai/rules/backend-rules.md</a:t>
+              <a:t>@.docs/rules/global-rules.md
+@.docs/rules/backend-rules.md</a:t>
             </a:r>
             <a:endParaRPr lang="en-US" sz="900" dirty="0"/>
           </a:p>
@@ -17520,7 +17520,7 @@
                 <a:ea typeface="Consolas" pitchFamily="34" charset="-122"/>
                 <a:cs typeface="Consolas" pitchFamily="34" charset="-120"/>
               </a:rPr>
-              <a:t>├─ .ai/
+              <a:t>├─ .docs/
 </a:t>
             </a:r>
             <a:r>
@@ -18152,7 +18152,7 @@
                 <a:ea typeface="Calibri" pitchFamily="34" charset="-122"/>
                 <a:cs typeface="Calibri" pitchFamily="34" charset="-120"/>
               </a:rPr>
-              <a:t>.md 하나에 통합  |  대규모: .ai/ 폴더로 계층 분리</a:t>
+              <a:t>.md 하나에 통합  |  대규모: .docs/ 폴더로 계층 분리</a:t>
             </a:r>
             <a:endParaRPr lang="en-US" sz="1200" dirty="0"/>
           </a:p>
